--- a/templates/carousel_dark_1x1/main_carousel.pptx
+++ b/templates/carousel_dark_1x1/main_carousel.pptx
@@ -3178,7 +3178,7 @@
         </p:nvSpPr>
         <p:spPr>
           <a:xfrm>
-            <a:off x="457200" y="457200"/>
+            <a:off x="914400" y="914400"/>
             <a:ext cx="2743200" cy="91440"/>
           </a:xfrm>
           <a:prstGeom prst="rect">
@@ -3223,8 +3223,8 @@
         </p:nvSpPr>
         <p:spPr>
           <a:xfrm>
-            <a:off x="457200" y="1828800"/>
-            <a:ext cx="8229600" cy="3657600"/>
+            <a:off x="914400" y="1828800"/>
+            <a:ext cx="7315200" cy="3657600"/>
           </a:xfrm>
           <a:prstGeom prst="rect">
             <a:avLst/>
@@ -3258,8 +3258,8 @@
         </p:nvSpPr>
         <p:spPr>
           <a:xfrm>
-            <a:off x="457200" y="5486400"/>
-            <a:ext cx="8229600" cy="1371600"/>
+            <a:off x="914400" y="5486400"/>
+            <a:ext cx="7315200" cy="1371600"/>
           </a:xfrm>
           <a:prstGeom prst="rect">
             <a:avLst/>
@@ -3389,7 +3389,7 @@
         </p:nvSpPr>
         <p:spPr>
           <a:xfrm>
-            <a:off x="457200" y="457200"/>
+            <a:off x="914400" y="914400"/>
             <a:ext cx="3657600" cy="457200"/>
           </a:xfrm>
           <a:prstGeom prst="rect">
@@ -3424,8 +3424,8 @@
         </p:nvSpPr>
         <p:spPr>
           <a:xfrm>
-            <a:off x="457200" y="1371600"/>
-            <a:ext cx="8229600" cy="1371600"/>
+            <a:off x="914400" y="1828800"/>
+            <a:ext cx="7315200" cy="1371600"/>
           </a:xfrm>
           <a:prstGeom prst="rect">
             <a:avLst/>
@@ -3459,8 +3459,8 @@
         </p:nvSpPr>
         <p:spPr>
           <a:xfrm>
-            <a:off x="457200" y="3200400"/>
-            <a:ext cx="8229600" cy="4572000"/>
+            <a:off x="914400" y="3657600"/>
+            <a:ext cx="7315200" cy="4572000"/>
           </a:xfrm>
           <a:prstGeom prst="rect">
             <a:avLst/>
@@ -3590,7 +3590,7 @@
         </p:nvSpPr>
         <p:spPr>
           <a:xfrm>
-            <a:off x="457200" y="457200"/>
+            <a:off x="914400" y="914400"/>
             <a:ext cx="3657600" cy="457200"/>
           </a:xfrm>
           <a:prstGeom prst="rect">
@@ -3625,8 +3625,8 @@
         </p:nvSpPr>
         <p:spPr>
           <a:xfrm>
-            <a:off x="457200" y="1371600"/>
-            <a:ext cx="8229600" cy="1371600"/>
+            <a:off x="914400" y="1828800"/>
+            <a:ext cx="7315200" cy="1371600"/>
           </a:xfrm>
           <a:prstGeom prst="rect">
             <a:avLst/>
@@ -3660,8 +3660,8 @@
         </p:nvSpPr>
         <p:spPr>
           <a:xfrm>
-            <a:off x="457200" y="3200400"/>
-            <a:ext cx="8229600" cy="4572000"/>
+            <a:off x="914400" y="3657600"/>
+            <a:ext cx="7315200" cy="4572000"/>
           </a:xfrm>
           <a:prstGeom prst="rect">
             <a:avLst/>
@@ -3791,7 +3791,7 @@
         </p:nvSpPr>
         <p:spPr>
           <a:xfrm>
-            <a:off x="457200" y="457200"/>
+            <a:off x="914400" y="914400"/>
             <a:ext cx="3657600" cy="457200"/>
           </a:xfrm>
           <a:prstGeom prst="rect">
@@ -3826,8 +3826,8 @@
         </p:nvSpPr>
         <p:spPr>
           <a:xfrm>
-            <a:off x="457200" y="1371600"/>
-            <a:ext cx="8229600" cy="1371600"/>
+            <a:off x="914400" y="1828800"/>
+            <a:ext cx="7315200" cy="1371600"/>
           </a:xfrm>
           <a:prstGeom prst="rect">
             <a:avLst/>
@@ -3861,8 +3861,8 @@
         </p:nvSpPr>
         <p:spPr>
           <a:xfrm>
-            <a:off x="457200" y="3200400"/>
-            <a:ext cx="8229600" cy="4572000"/>
+            <a:off x="914400" y="3657600"/>
+            <a:ext cx="7315200" cy="4572000"/>
           </a:xfrm>
           <a:prstGeom prst="rect">
             <a:avLst/>
@@ -3992,7 +3992,7 @@
         </p:nvSpPr>
         <p:spPr>
           <a:xfrm>
-            <a:off x="457200" y="457200"/>
+            <a:off x="914400" y="914400"/>
             <a:ext cx="2743200" cy="91440"/>
           </a:xfrm>
           <a:prstGeom prst="rect">
@@ -4037,8 +4037,8 @@
         </p:nvSpPr>
         <p:spPr>
           <a:xfrm>
-            <a:off x="457200" y="1828800"/>
-            <a:ext cx="8229600" cy="1828800"/>
+            <a:off x="914400" y="1828800"/>
+            <a:ext cx="7315200" cy="1828800"/>
           </a:xfrm>
           <a:prstGeom prst="rect">
             <a:avLst/>
@@ -4072,8 +4072,8 @@
         </p:nvSpPr>
         <p:spPr>
           <a:xfrm>
-            <a:off x="457200" y="4114800"/>
-            <a:ext cx="8229600" cy="2743200"/>
+            <a:off x="914400" y="4114800"/>
+            <a:ext cx="7315200" cy="2743200"/>
           </a:xfrm>
           <a:prstGeom prst="rect">
             <a:avLst/>
@@ -4081,7 +4081,7 @@
           <a:noFill/>
         </p:spPr>
         <p:txBody>
-          <a:bodyPr wrap="none">
+          <a:bodyPr wrap="square">
             <a:spAutoFit/>
           </a:bodyPr>
           <a:lstStyle/>
